--- a/agent-observability-course/10-graphics/slides/section-08.pptx
+++ b/agent-observability-course/10-graphics/slides/section-08.pptx
@@ -627,7 +627,7 @@
           <a:p/>
           <a:p>
             <a:r>
-              <a:t>And here's what you get in Langfuse with keys: four scores on the trace, with the judge's name as the comment, so you always know which judge said it. Two things to check on your run. The `langfuse_writes` count in the summary line must be above zero; if it isn't, the judge process never set up its Langfuse client. And G-Eval also produces a reason for each score; storing `metric.reason` as the comment is a two-line change, and it's the change that lets a human check a score in ten seconds.</a:t>
+              <a:t>And here's what you get in Langfuse with keys: four scores on the trace, with the judge's name as the comment, so you always know which judge said it. Two things to check on your run. The `langfuse_writes` count in the summary line should match four times `scored`; offline it stays at zero unless you pass `LANGFUSE=1`. And G-Eval also produces a reason for each score; storing `metric.reason` as the comment is a two-line change, and it's the change that lets a human check a score in ten seconds.</a:t>
             </a:r>
           </a:p>
         </p:txBody>
@@ -1143,13 +1143,13 @@
           <a:p/>
           <a:p>
             <a:r>
-              <a:t>Here's the replayed day. Injection attempts: seventy-two in total, a fraction of a percent of every hour, a little more in the morning peak. Refusals: zero, because no tenant came near its budget. And PII in output, a few percent of answers in every single hour. That last line deserves suspicion. Open a few of the flagged traces.</a:t>
+              <a:t>Here's the replayed day. Injection attempts: seventy-two in total, a fraction of a percent of every hour, a little more in the morning peak. Refusals: zero, because no tenant came near its budget. And PII in output: zero, in every hour. A flat zero deserves as much suspicion as a spike. Is the detector working, or is it blind? Check both.</a:t>
             </a:r>
           </a:p>
           <a:p/>
           <a:p>
             <a:r>
-              <a:t>[SCREEN: terminal: list the flagged answers from the store]</a:t>
+              <a:t>[SCREEN: terminal: count the flagged answers in the store, then run the detector on text you wrote yourself]</a:t>
             </a:r>
           </a:p>
           <a:p/>
@@ -1161,7 +1161,7 @@
           <a:p/>
           <a:p>
             <a:r>
-              <a:t>Six hundred seventy-eight flagged answers. Read the first one. There it is. The policy article tells people their employee ID has the format `NW-12345`, Atlas quotes the article, and the detector sees an employee ID. It's an example, not a person. Most of the flags on the replay are like this: format examples in policy text. A detector you haven't read the output of is a detector that will page you for the knowledge base.</a:t>
+              <a:t>Zero flagged answers, and here's why that's a real zero and not a blind one. The detector uses the same patterns as the masker, but it ignores a short list of values the knowledge base itself publishes: the `NW-12345` format example from the password article, the helpdesk, security and network addresses, the employee-assistance phone line. Any other e-mail, phone, employee ID or card still counts, and the masker in Section 10 masks all of them regardless, published or not. That allowlist is not decoration. Before it existed, this same day showed six hundred seventy-eight flags, every one of them Atlas quoting a policy article. A detector you haven't read the output of is a detector that will page you for the knowledge base; the morning you add a new policy page with a new example address, this line is the first place you'll see it.</a:t>
             </a:r>
           </a:p>
         </p:txBody>
@@ -1231,7 +1231,7 @@
           <a:lstStyle/>
           <a:p>
             <a:r>
-              <a:t>Thresholds, from your own baseline, not from mine. Warn at about three times normal over an hour; page at ten times over fifteen minutes. And notice the PII row's page condition: raw PII reaching your telemetry isn't a metric threshold, it's a test in Section 10 that must never fail. The metric here is the detector's catch rate, and its job is to tell you when a prompt change starts producing more to catch. Fix the false positives first, with an allowlist for format examples, or this line will train everyone to ignore it.</a:t>
+              <a:t>Thresholds, from your own baseline, not from mine. Warn at about three times normal over an hour; page at ten times over fifteen minutes. And notice the PII row's page condition: raw PII reaching your telemetry isn't a metric threshold, it's a test in Section 10 that must never fail. The metric here is the detector's catch rate, and its job is to tell you when a prompt change starts producing more to catch. Keep the allowlist honest: it holds what the knowledge base publishes and nothing else. The day that line showed six hundred seventy-eight flags for policy text, it was training everyone to ignore it.</a:t>
             </a:r>
           </a:p>
         </p:txBody>
@@ -1923,7 +1923,12 @@
           <a:p/>
           <a:p>
             <a:r>
-              <a:t>Version two passes a hundred thirty-six of a hundred seventy. Version one passes a hundred sixty-eight. That's the evidence for the rollback in Incident 3, produced before anyone touched the production label. If you've taken my testing and evaluation course, this is the offline eval loop you already know, fed from production instead of from a hand-written file.</a:t>
+              <a:t>Version two passes a hundred fifty of a hundred seventy. Version one passes a hundred sixty-eight. That's the evidence for the rollback in Incident 3, produced before anyone touched the production label. One detail in the script matters: the judge is passed a fixed id per item, `candidate-0`, `candidate-1` and so on. The offline judge adds a little noise keyed on the trace id, and version two's answers sit right at the threshold, so with the agent's own random trace ids the v2 figure wanders between about a hundred forty-two and a hundred forty-seven from run to run. Fixed ids make the comparison repeatable; the conclusion is the same either way.</a:t>
+            </a:r>
+          </a:p>
+          <a:p>
+            <a:r>
+              <a:t>If you've taken my testing and evaluation course, this is the offline eval loop you already know, fed from production instead of from a hand-written file.</a:t>
             </a:r>
           </a:p>
           <a:p/>
@@ -2847,7 +2852,7 @@
           <a:p/>
           <a:p>
             <a:r>
-              <a:t>Walk the agent spans in the store. Skip guardrail hits and budget refusals, and anything already scored, so the job is idempotent. Build the `TraceSummary` the policy needs and ask `should_judge`. For a sampled trace, the judge reads the question and the answer and returns the three scores plus `overall`.</a:t>
+              <a:t>Walk the agent spans in the store. Skip guardrail hits and budget refusals, and anything already scored, so the job is idempotent. Build the `TraceSummary` the policy needs, including whether the trace carries a thumbs-down, and ask `should_judge`: escalations and thumbs-down always, errors never, everything else by the head hash. For a sampled trace, the judge reads the question and the answer and returns the three scores plus `overall`.</a:t>
             </a:r>
           </a:p>
           <a:p/>
@@ -2859,7 +2864,7 @@
           <a:p/>
           <a:p>
             <a:r>
-              <a:t>Then every score is written twice: to the local store, which the console, the drift report and the CI gate read, and to Langfuse with `create_score`, the trace id, the name prefixed `judge_`, the value, and the judge's name as the comment. And the summary keeps a running estimate of what judging cost: three calls per trace at the mini price. That's the line item. Two honest notes. The tail rule for thumbs-down lives in the policy, but this loop only fills in `escalated`; wiring the feedback flag in is a one-line exercise. And `atlas_judge_score` exists in `metrics.py`, but this batch job never observes it, so Prometheus doesn't see judge scores. We come back to that in 9.5.</a:t>
+              <a:t>Then every score is written twice: to the local store, which the console, the drift report and the CI gate read, and to Langfuse with `create_score`, the trace id, the name prefixed `judge_`, the value, and the judge's name as the comment. And the summary keeps a running estimate of what judging cost: three calls per trace at the mini price. That's the line item. Two honest notes. The cap, `JUDGE_MAX_CALLS` or `--limit`, stops the loop before the next trace is counted, so a capped run reports `sampled` equal to `scored`. And `atlas_judge_score` exists in `metrics.py`, but this batch job never observes it, so Prometheus doesn't see judge scores. We come back to that in 9.5.</a:t>
             </a:r>
           </a:p>
           <a:p/>
@@ -2877,7 +2882,7 @@
           <a:p/>
           <a:p>
             <a:r>
-              <a:t>Ten thousand one hundred twelve candidates: the day minus the guardrail hits. Two thousand nine hundred seventy-one already scored by the replay, so they're skipped. Seven hundred twelve more sampled and scored at ten percent, mean overall point nine oh seven. Zero Langfuse writes, because we're offline. And the bill: a dollar fifty-four for this run, at the mini judge's price.</a:t>
+              <a:t>Ten thousand one hundred twelve candidates: the day minus the guardrail hits. Two thousand nine hundred seventy-one already scored by the replay, so they're skipped. Eight hundred ninety-four more sampled and scored: the ten percent head, plus every escalation and every thumbs-down the replay hadn't scored yet, which is why it's more than ten percent of what was left. Mean overall point nine oh nine. Zero Langfuse writes, because we're offline. And the bill: a dollar ninety-three for this run, at the mini judge's price.</a:t>
             </a:r>
           </a:p>
         </p:txBody>
@@ -11050,7 +11055,7 @@
         </p:nvGraphicFramePr>
         <p:xfrm>
           <a:off x="457200" y="1325880"/>
-          <a:ext cx="11292838" cy="1536192"/>
+          <a:ext cx="11292837" cy="1536192"/>
         </p:xfrm>
         <a:graphic>
           <a:graphicData uri="http://schemas.openxmlformats.org/drawingml/2006/table">
@@ -11059,10 +11064,10 @@
                 <a:tableStyleId>{5C22544A-7EE6-4342-B048-85BDC9FD1C3A}</a:tableStyleId>
               </a:tblPr>
               <a:tblGrid>
-                <a:gridCol w="1286526"/>
-                <a:gridCol w="3502209"/>
-                <a:gridCol w="2215683"/>
-                <a:gridCol w="4288420"/>
+                <a:gridCol w="1026621"/>
+                <a:gridCol w="3422072"/>
+                <a:gridCol w="3422072"/>
+                <a:gridCol w="3422072"/>
               </a:tblGrid>
               <a:tr h="384048">
                 <a:tc>
@@ -11387,7 +11392,43 @@
                           </a:solidFill>
                           <a:latin typeface="Inter"/>
                         </a:rPr>
-                        <a:t>Safety page, after removing known false positives</a:t>
+                        <a:t>Safety page; 0 on the replayed day (</a:t>
+                      </a:r>
+                      <a:r>
+                        <a:rPr sz="1104" b="0">
+                          <a:solidFill>
+                            <a:srgbClr val="00D4AA"/>
+                          </a:solidFill>
+                          <a:latin typeface="JetBrains Mono"/>
+                        </a:rPr>
+                        <a:t>contains_pii</a:t>
+                      </a:r>
+                      <a:r>
+                        <a:rPr sz="1200" b="0">
+                          <a:solidFill>
+                            <a:srgbClr val="FFFFFF"/>
+                          </a:solidFill>
+                          <a:latin typeface="Inter"/>
+                        </a:rPr>
+                        <a:t> ignores the values the KB publishes, </a:t>
+                      </a:r>
+                      <a:r>
+                        <a:rPr sz="1104" b="0">
+                          <a:solidFill>
+                            <a:srgbClr val="00D4AA"/>
+                          </a:solidFill>
+                          <a:latin typeface="JetBrains Mono"/>
+                        </a:rPr>
+                        <a:t>published_values()</a:t>
+                      </a:r>
+                      <a:r>
+                        <a:rPr sz="1200" b="0">
+                          <a:solidFill>
+                            <a:srgbClr val="FFFFFF"/>
+                          </a:solidFill>
+                          <a:latin typeface="Inter"/>
+                        </a:rPr>
+                        <a:t>)</a:t>
                       </a:r>
                     </a:p>
                   </a:txBody>
@@ -11409,7 +11450,7 @@
                           </a:solidFill>
                           <a:latin typeface="Inter"/>
                         </a:rPr>
-                        <a:t>3× baseline over 1 h</a:t>
+                        <a:t>any sustained non-zero rate; 3× baseline over 1 h once there is one</a:t>
                       </a:r>
                     </a:p>
                   </a:txBody>
